--- a/docs/ppt/析知XiZhi-作品介绍-v3-1008.pptx
+++ b/docs/ppt/析知XiZhi-作品介绍-v3-1008.pptx
@@ -3499,7 +3499,7 @@
               </a:defRPr>
             </a:pPr>
             <a:r>
-              <a:t>**P3 · 前端与交互**   GitHub `Reyen`     —— 界面 / 交互 / 演示</a:t>
+              <a:t>**P3 · 前端与交互**   GitHub `RyeYen`     —— 界面 / 交互 / 演示</a:t>
             </a:r>
           </a:p>
           <a:p>
@@ -4187,7 +4187,7 @@
               </a:defRPr>
             </a:pPr>
             <a:r>
-              <a:t>**可当场验证**：图上 629 节点 / 645 边，**环数 = 0**</a:t>
+              <a:t>**可当场验证**：图上 213 节点 / 229 边，**环数 = 0**</a:t>
             </a:r>
           </a:p>
           <a:p>
@@ -4981,7 +4981,7 @@
               </a:defRPr>
             </a:pPr>
             <a:r>
-              <a:t>**629 个知识点里 462 个是副本**（最大一组 35 个成员）——</a:t>
+              <a:t>**213 个知识点里 67 个是真重复**（最大一组 17 个成员）——</a:t>
             </a:r>
           </a:p>
           <a:p>
@@ -4996,7 +4996,7 @@
               </a:defRPr>
             </a:pPr>
             <a:r>
-              <a:t>  **我们只做标注、不删数据**。文案写「**已合并显示**」，**绝不写「已去重」**</a:t>
+              <a:t>  **我们只做标注、不删数据**，文案写「**已合并显示**」 —— 而且**抽取器早先误把 483 处抽成副本的那个 bug，我们已经修了**</a:t>
             </a:r>
           </a:p>
           <a:p>
@@ -5011,7 +5011,7 @@
               </a:defRPr>
             </a:pPr>
             <a:r>
-              <a:t>**438 / 629 = 69.6% 的知识点有可读标题**，**剩下 191 个照实显示原名** ——</a:t>
+              <a:t>**629 / 629 = 100% 的知识点有可读标题**（补过一轮：原先 191 个没有的，用材料正文的**完整句**补上，**截断只在词边界断**）——</a:t>
             </a:r>
           </a:p>
           <a:p>
